--- a/public/fun/cards/food/food-23.pptx
+++ b/public/fun/cards/food/food-23.pptx
@@ -3085,7 +3085,7 @@
     <p:bg>
       <p:bgPr>
         <a:solidFill>
-          <a:srgbClr val="A25A1B"/>
+          <a:srgbClr val="4A3AFF"/>
         </a:solidFill>
         <a:effectLst/>
       </p:bgPr>
@@ -3099,43 +3099,14 @@
       <p:grpSpPr/>
       <p:sp>
         <p:nvSpPr>
-          <p:cNvPr id="2" name="Rectangle 1"/>
+          <p:cNvPr id="2" name="Freeform 1"/>
           <p:cNvSpPr/>
           <p:nvPr/>
         </p:nvSpPr>
         <p:spPr>
           <a:xfrm>
-            <a:off x="0" y="0"/>
-            <a:ext cx="3240000" cy="720000"/>
-          </a:xfrm>
-          <a:prstGeom prst="rect">
-            <a:avLst/>
-          </a:prstGeom>
-          <a:solidFill>
-            <a:srgbClr val="F8DFC9"/>
-          </a:solidFill>
-          <a:ln>
-            <a:noFill/>
-          </a:ln>
-        </p:spPr>
-        <p:txBody>
-          <a:bodyPr rtlCol="0" anchor="ctr"/>
-          <a:lstStyle/>
-          <a:p>
-            <a:pPr algn="ctr"/>
-          </a:p>
-        </p:txBody>
-      </p:sp>
-      <p:sp>
-        <p:nvSpPr>
-          <p:cNvPr id="3" name="Freeform 2"/>
-          <p:cNvSpPr/>
-          <p:nvPr/>
-        </p:nvSpPr>
-        <p:spPr>
-          <a:xfrm>
-            <a:off x="2705760" y="360000"/>
-            <a:ext cx="276480" cy="117504"/>
+            <a:off x="2016000" y="0"/>
+            <a:ext cx="1224000" cy="1800000"/>
           </a:xfrm>
           <a:custGeom>
             <a:avLst/>
@@ -3144,58 +3115,25 @@
             <a:cxnLst/>
             <a:rect l="l" t="t" r="r" b="b"/>
             <a:pathLst>
-              <a:path w="276480" h="117504">
+              <a:path w="1224000" h="1800000">
                 <a:moveTo>
-                  <a:pt x="276480" y="0"/>
+                  <a:pt x="360000" y="0"/>
                 </a:moveTo>
                 <a:lnTo>
-                  <a:pt x="273014" y="26147"/>
+                  <a:pt x="1224000" y="0"/>
                 </a:lnTo>
                 <a:lnTo>
-                  <a:pt x="262790" y="50983"/>
+                  <a:pt x="1224000" y="1800000"/>
                 </a:lnTo>
                 <a:lnTo>
-                  <a:pt x="246320" y="73263"/>
-                </a:lnTo>
-                <a:lnTo>
-                  <a:pt x="224431" y="91868"/>
-                </a:lnTo>
-                <a:lnTo>
-                  <a:pt x="198220" y="105867"/>
-                </a:lnTo>
-                <a:lnTo>
-                  <a:pt x="169001" y="114558"/>
-                </a:lnTo>
-                <a:lnTo>
-                  <a:pt x="138240" y="117504"/>
-                </a:lnTo>
-                <a:lnTo>
-                  <a:pt x="107479" y="114558"/>
-                </a:lnTo>
-                <a:lnTo>
-                  <a:pt x="78260" y="105867"/>
-                </a:lnTo>
-                <a:lnTo>
-                  <a:pt x="52049" y="91868"/>
-                </a:lnTo>
-                <a:lnTo>
-                  <a:pt x="30160" y="73263"/>
-                </a:lnTo>
-                <a:lnTo>
-                  <a:pt x="13690" y="50983"/>
-                </a:lnTo>
-                <a:lnTo>
-                  <a:pt x="3466" y="26147"/>
-                </a:lnTo>
-                <a:lnTo>
-                  <a:pt x="0" y="0"/>
+                  <a:pt x="0" y="1800000"/>
                 </a:lnTo>
                 <a:close/>
               </a:path>
             </a:pathLst>
           </a:custGeom>
           <a:solidFill>
-            <a:srgbClr val="595959"/>
+            <a:srgbClr val="FFFFFF"/>
           </a:solidFill>
           <a:ln>
             <a:noFill/>
@@ -3211,22 +3149,41 @@
       </p:sp>
       <p:sp>
         <p:nvSpPr>
-          <p:cNvPr id="4" name="Rounded Rectangle 3"/>
+          <p:cNvPr id="3" name="Freeform 2"/>
           <p:cNvSpPr/>
           <p:nvPr/>
         </p:nvSpPr>
         <p:spPr>
           <a:xfrm>
-            <a:off x="2754144" y="474048"/>
-            <a:ext cx="179712" cy="24192"/>
+            <a:off x="1864800" y="0"/>
+            <a:ext cx="460800" cy="1800000"/>
           </a:xfrm>
-          <a:prstGeom prst="roundRect">
-            <a:avLst>
-              <a:gd name="adj" fmla="val 42857"/>
-            </a:avLst>
-          </a:prstGeom>
+          <a:custGeom>
+            <a:avLst/>
+            <a:gdLst/>
+            <a:ahLst/>
+            <a:cxnLst/>
+            <a:rect l="l" t="t" r="r" b="b"/>
+            <a:pathLst>
+              <a:path w="460800" h="1800000">
+                <a:moveTo>
+                  <a:pt x="360000" y="0"/>
+                </a:moveTo>
+                <a:lnTo>
+                  <a:pt x="460800" y="0"/>
+                </a:lnTo>
+                <a:lnTo>
+                  <a:pt x="100800" y="1800000"/>
+                </a:lnTo>
+                <a:lnTo>
+                  <a:pt x="0" y="1800000"/>
+                </a:lnTo>
+                <a:close/>
+              </a:path>
+            </a:pathLst>
+          </a:custGeom>
           <a:solidFill>
-            <a:srgbClr val="E6E6E6"/>
+            <a:srgbClr val="6E61FF"/>
           </a:solidFill>
           <a:ln>
             <a:noFill/>
@@ -3240,58 +3197,16 @@
           </a:p>
         </p:txBody>
       </p:sp>
-      <p:cxnSp>
-        <p:nvCxnSpPr>
-          <p:cNvPr id="5" name="Connector 4"/>
-          <p:cNvCxnSpPr/>
+      <p:sp>
+        <p:nvSpPr>
+          <p:cNvPr id="4" name="텍스트"/>
+          <p:cNvSpPr txBox="1"/>
           <p:nvPr/>
-        </p:nvCxnSpPr>
+        </p:nvSpPr>
         <p:spPr>
           <a:xfrm>
-            <a:off x="2823264" y="242496"/>
-            <a:ext cx="124416" cy="103680"/>
-          </a:xfrm>
-          <a:prstGeom prst="line">
-            <a:avLst/>
-          </a:prstGeom>
-          <a:ln w="17280">
-            <a:solidFill>
-              <a:srgbClr val="E6E6E6"/>
-            </a:solidFill>
-          </a:ln>
-        </p:spPr>
-      </p:cxnSp>
-      <p:cxnSp>
-        <p:nvCxnSpPr>
-          <p:cNvPr id="6" name="Connector 5"/>
-          <p:cNvCxnSpPr/>
-          <p:nvPr/>
-        </p:nvCxnSpPr>
-        <p:spPr>
-          <a:xfrm>
-            <a:off x="2864736" y="242496"/>
-            <a:ext cx="117504" cy="89856"/>
-          </a:xfrm>
-          <a:prstGeom prst="line">
-            <a:avLst/>
-          </a:prstGeom>
-          <a:ln w="17280">
-            <a:solidFill>
-              <a:srgbClr val="E6E6E6"/>
-            </a:solidFill>
-          </a:ln>
-        </p:spPr>
-      </p:cxnSp>
-      <p:sp>
-        <p:nvSpPr>
-          <p:cNvPr id="7" name="텍스트"/>
-          <p:cNvSpPr txBox="1"/>
-          <p:nvPr/>
-        </p:nvSpPr>
-        <p:spPr>
-          <a:xfrm>
-            <a:off x="230400" y="187200"/>
-            <a:ext cx="2160000" cy="305437"/>
+            <a:off x="252000" y="223200"/>
+            <a:ext cx="1440000" cy="133351"/>
           </a:xfrm>
           <a:prstGeom prst="rect">
             <a:avLst/>
@@ -3306,32 +3221,32 @@
           <a:p>
             <a:pPr algn="l">
               <a:lnSpc>
-                <a:spcPts val="2682"/>
+                <a:spcPts val="1015"/>
               </a:lnSpc>
             </a:pPr>
             <a:r>
-              <a:rPr sz="1850" b="1" spc="50">
+              <a:rPr sz="700" b="1" spc="200">
                 <a:solidFill>
-                  <a:srgbClr val="595959"/>
+                  <a:srgbClr val="D7D4FF"/>
                 </a:solidFill>
-                <a:latin typeface="바탕"/>
-                <a:ea typeface="바탕"/>
+                <a:latin typeface="맑은 고딕"/>
+                <a:ea typeface="맑은 고딕"/>
               </a:rPr>
-              <a:t>류하은</a:t>
-            </a:r>
-          </a:p>
-        </p:txBody>
-      </p:sp>
-      <p:sp>
-        <p:nvSpPr>
-          <p:cNvPr id="8" name="텍스트"/>
+              <a:t>상호명</a:t>
+            </a:r>
+          </a:p>
+        </p:txBody>
+      </p:sp>
+      <p:sp>
+        <p:nvSpPr>
+          <p:cNvPr id="5" name="텍스트"/>
           <p:cNvSpPr txBox="1"/>
           <p:nvPr/>
         </p:nvSpPr>
         <p:spPr>
           <a:xfrm>
-            <a:off x="230400" y="475200"/>
-            <a:ext cx="2160000" cy="122400"/>
+            <a:off x="252000" y="540000"/>
+            <a:ext cx="1584000" cy="360000"/>
           </a:xfrm>
           <a:prstGeom prst="rect">
             <a:avLst/>
@@ -3346,32 +3261,32 @@
           <a:p>
             <a:pPr algn="l">
               <a:lnSpc>
-                <a:spcPts val="1232"/>
+                <a:spcPts val="3190"/>
               </a:lnSpc>
             </a:pPr>
             <a:r>
-              <a:rPr sz="850" b="1">
+              <a:rPr sz="2200" b="1">
                 <a:solidFill>
-                  <a:srgbClr val="595959"/>
+                  <a:srgbClr val="FFFFFF"/>
                 </a:solidFill>
                 <a:latin typeface="맑은 고딕"/>
                 <a:ea typeface="맑은 고딕"/>
               </a:rPr>
-              <a:t>베이커 · 대표</a:t>
-            </a:r>
-          </a:p>
-        </p:txBody>
-      </p:sp>
-      <p:sp>
-        <p:nvSpPr>
-          <p:cNvPr id="9" name="텍스트"/>
+              <a:t>류하은</a:t>
+            </a:r>
+          </a:p>
+        </p:txBody>
+      </p:sp>
+      <p:sp>
+        <p:nvSpPr>
+          <p:cNvPr id="6" name="텍스트"/>
           <p:cNvSpPr txBox="1"/>
           <p:nvPr/>
         </p:nvSpPr>
         <p:spPr>
           <a:xfrm>
-            <a:off x="230400" y="835200"/>
-            <a:ext cx="1800000" cy="100800"/>
+            <a:off x="252000" y="943200"/>
+            <a:ext cx="1584000" cy="171451"/>
           </a:xfrm>
           <a:prstGeom prst="rect">
             <a:avLst/>
@@ -3386,32 +3301,61 @@
           <a:p>
             <a:pPr algn="l">
               <a:lnSpc>
-                <a:spcPts val="1087"/>
+                <a:spcPts val="1305"/>
               </a:lnSpc>
             </a:pPr>
             <a:r>
-              <a:rPr sz="750" b="1" spc="150">
+              <a:rPr sz="900" b="0">
                 <a:solidFill>
-                  <a:srgbClr val="F5EEE7"/>
+                  <a:srgbClr val="D7D4FF"/>
                 </a:solidFill>
                 <a:latin typeface="맑은 고딕"/>
                 <a:ea typeface="맑은 고딕"/>
               </a:rPr>
-              <a:t>상호명</a:t>
-            </a:r>
-          </a:p>
-        </p:txBody>
-      </p:sp>
-      <p:sp>
-        <p:nvSpPr>
-          <p:cNvPr id="10" name="텍스트"/>
+              <a:t>베이커 · 대표</a:t>
+            </a:r>
+          </a:p>
+        </p:txBody>
+      </p:sp>
+      <p:sp>
+        <p:nvSpPr>
+          <p:cNvPr id="7" name="Rectangle 6"/>
+          <p:cNvSpPr/>
+          <p:nvPr/>
+        </p:nvSpPr>
+        <p:spPr>
+          <a:xfrm>
+            <a:off x="252000" y="1195200"/>
+            <a:ext cx="144000" cy="18000"/>
+          </a:xfrm>
+          <a:prstGeom prst="rect">
+            <a:avLst/>
+          </a:prstGeom>
+          <a:solidFill>
+            <a:srgbClr val="FFFFFF"/>
+          </a:solidFill>
+          <a:ln>
+            <a:noFill/>
+          </a:ln>
+        </p:spPr>
+        <p:txBody>
+          <a:bodyPr rtlCol="0" anchor="ctr"/>
+          <a:lstStyle/>
+          <a:p>
+            <a:pPr algn="ctr"/>
+          </a:p>
+        </p:txBody>
+      </p:sp>
+      <p:sp>
+        <p:nvSpPr>
+          <p:cNvPr id="8" name="텍스트"/>
           <p:cNvSpPr txBox="1"/>
           <p:nvPr/>
         </p:nvSpPr>
         <p:spPr>
           <a:xfrm>
-            <a:off x="230400" y="1015200"/>
-            <a:ext cx="122400" cy="168911"/>
+            <a:off x="252000" y="1328400"/>
+            <a:ext cx="331200" cy="99061"/>
           </a:xfrm>
           <a:prstGeom prst="rect">
             <a:avLst/>
@@ -3426,32 +3370,32 @@
           <a:p>
             <a:pPr algn="l">
               <a:lnSpc>
-                <a:spcPts val="1015"/>
+                <a:spcPts val="754"/>
               </a:lnSpc>
             </a:pPr>
             <a:r>
-              <a:rPr sz="700" b="1">
+              <a:rPr sz="520" b="1" spc="120">
                 <a:solidFill>
-                  <a:srgbClr val="FBECDF"/>
+                  <a:srgbClr val="D7D4FF"/>
                 </a:solidFill>
                 <a:latin typeface="맑은 고딕"/>
                 <a:ea typeface="맑은 고딕"/>
               </a:rPr>
-              <a:t>T</a:t>
-            </a:r>
-          </a:p>
-        </p:txBody>
-      </p:sp>
-      <p:sp>
-        <p:nvSpPr>
-          <p:cNvPr id="11" name="텍스트"/>
+              <a:t>TEL</a:t>
+            </a:r>
+          </a:p>
+        </p:txBody>
+      </p:sp>
+      <p:sp>
+        <p:nvSpPr>
+          <p:cNvPr id="9" name="텍스트"/>
           <p:cNvSpPr txBox="1"/>
           <p:nvPr/>
         </p:nvSpPr>
         <p:spPr>
           <a:xfrm>
-            <a:off x="374400" y="1015200"/>
-            <a:ext cx="1872000" cy="168911"/>
+            <a:off x="583200" y="1317600"/>
+            <a:ext cx="1188000" cy="125731"/>
           </a:xfrm>
           <a:prstGeom prst="rect">
             <a:avLst/>
@@ -3466,11 +3410,11 @@
           <a:p>
             <a:pPr algn="l">
               <a:lnSpc>
-                <a:spcPts val="1015"/>
+                <a:spcPts val="956"/>
               </a:lnSpc>
             </a:pPr>
             <a:r>
-              <a:rPr sz="700" b="0">
+              <a:rPr sz="660" b="0">
                 <a:solidFill>
                   <a:srgbClr val="FFFFFF"/>
                 </a:solidFill>
@@ -3484,14 +3428,14 @@
       </p:sp>
       <p:sp>
         <p:nvSpPr>
-          <p:cNvPr id="12" name="텍스트"/>
+          <p:cNvPr id="10" name="텍스트"/>
           <p:cNvSpPr txBox="1"/>
           <p:nvPr/>
         </p:nvSpPr>
         <p:spPr>
           <a:xfrm>
-            <a:off x="230400" y="1184111"/>
-            <a:ext cx="122400" cy="168911"/>
+            <a:off x="252000" y="1458000"/>
+            <a:ext cx="331200" cy="99061"/>
           </a:xfrm>
           <a:prstGeom prst="rect">
             <a:avLst/>
@@ -3506,32 +3450,32 @@
           <a:p>
             <a:pPr algn="l">
               <a:lnSpc>
-                <a:spcPts val="1015"/>
+                <a:spcPts val="754"/>
               </a:lnSpc>
             </a:pPr>
             <a:r>
-              <a:rPr sz="700" b="1">
+              <a:rPr sz="520" b="1" spc="120">
                 <a:solidFill>
-                  <a:srgbClr val="FBECDF"/>
+                  <a:srgbClr val="D7D4FF"/>
                 </a:solidFill>
                 <a:latin typeface="맑은 고딕"/>
                 <a:ea typeface="맑은 고딕"/>
               </a:rPr>
-              <a:t>E</a:t>
-            </a:r>
-          </a:p>
-        </p:txBody>
-      </p:sp>
-      <p:sp>
-        <p:nvSpPr>
-          <p:cNvPr id="13" name="텍스트"/>
+              <a:t>MAIL</a:t>
+            </a:r>
+          </a:p>
+        </p:txBody>
+      </p:sp>
+      <p:sp>
+        <p:nvSpPr>
+          <p:cNvPr id="11" name="텍스트"/>
           <p:cNvSpPr txBox="1"/>
           <p:nvPr/>
         </p:nvSpPr>
         <p:spPr>
           <a:xfrm>
-            <a:off x="374400" y="1184111"/>
-            <a:ext cx="1872000" cy="168911"/>
+            <a:off x="583200" y="1447200"/>
+            <a:ext cx="1188000" cy="125731"/>
           </a:xfrm>
           <a:prstGeom prst="rect">
             <a:avLst/>
@@ -3546,11 +3490,11 @@
           <a:p>
             <a:pPr algn="l">
               <a:lnSpc>
-                <a:spcPts val="1015"/>
+                <a:spcPts val="956"/>
               </a:lnSpc>
             </a:pPr>
             <a:r>
-              <a:rPr sz="700" b="0">
+              <a:rPr sz="660" b="0">
                 <a:solidFill>
                   <a:srgbClr val="FFFFFF"/>
                 </a:solidFill>
@@ -3564,14 +3508,14 @@
       </p:sp>
       <p:sp>
         <p:nvSpPr>
-          <p:cNvPr id="14" name="텍스트"/>
+          <p:cNvPr id="12" name="텍스트"/>
           <p:cNvSpPr txBox="1"/>
           <p:nvPr/>
         </p:nvSpPr>
         <p:spPr>
           <a:xfrm>
-            <a:off x="230400" y="1353022"/>
-            <a:ext cx="122400" cy="168911"/>
+            <a:off x="252000" y="1587600"/>
+            <a:ext cx="331200" cy="99061"/>
           </a:xfrm>
           <a:prstGeom prst="rect">
             <a:avLst/>
@@ -3586,32 +3530,32 @@
           <a:p>
             <a:pPr algn="l">
               <a:lnSpc>
-                <a:spcPts val="1015"/>
+                <a:spcPts val="754"/>
               </a:lnSpc>
             </a:pPr>
             <a:r>
-              <a:rPr sz="700" b="1">
+              <a:rPr sz="520" b="1" spc="120">
                 <a:solidFill>
-                  <a:srgbClr val="FBECDF"/>
+                  <a:srgbClr val="D7D4FF"/>
                 </a:solidFill>
                 <a:latin typeface="맑은 고딕"/>
                 <a:ea typeface="맑은 고딕"/>
               </a:rPr>
-              <a:t>A</a:t>
-            </a:r>
-          </a:p>
-        </p:txBody>
-      </p:sp>
-      <p:sp>
-        <p:nvSpPr>
-          <p:cNvPr id="15" name="텍스트"/>
+              <a:t>ADDR</a:t>
+            </a:r>
+          </a:p>
+        </p:txBody>
+      </p:sp>
+      <p:sp>
+        <p:nvSpPr>
+          <p:cNvPr id="13" name="텍스트"/>
           <p:cNvSpPr txBox="1"/>
           <p:nvPr/>
         </p:nvSpPr>
         <p:spPr>
           <a:xfrm>
-            <a:off x="374400" y="1353022"/>
-            <a:ext cx="1872000" cy="168911"/>
+            <a:off x="583200" y="1576800"/>
+            <a:ext cx="1188000" cy="125731"/>
           </a:xfrm>
           <a:prstGeom prst="rect">
             <a:avLst/>
@@ -3626,11 +3570,11 @@
           <a:p>
             <a:pPr algn="l">
               <a:lnSpc>
-                <a:spcPts val="1015"/>
+                <a:spcPts val="956"/>
               </a:lnSpc>
             </a:pPr>
             <a:r>
-              <a:rPr sz="700" b="0">
+              <a:rPr sz="660" b="0">
                 <a:solidFill>
                   <a:srgbClr val="FFFFFF"/>
                 </a:solidFill>
@@ -3656,7 +3600,7 @@
     <p:bg>
       <p:bgPr>
         <a:solidFill>
-          <a:srgbClr val="723F13"/>
+          <a:srgbClr val="0E1116"/>
         </a:solidFill>
         <a:effectLst/>
       </p:bgPr>
@@ -3670,181 +3614,24 @@
       <p:grpSpPr/>
       <p:sp>
         <p:nvSpPr>
-          <p:cNvPr id="2" name="Freeform 1"/>
+          <p:cNvPr id="2" name="Rectangle 1"/>
           <p:cNvSpPr/>
           <p:nvPr/>
         </p:nvSpPr>
         <p:spPr>
           <a:xfrm>
-            <a:off x="986400" y="900000"/>
-            <a:ext cx="1267200" cy="538560"/>
-          </a:xfrm>
-          <a:custGeom>
-            <a:avLst/>
-            <a:gdLst/>
-            <a:ahLst/>
-            <a:cxnLst/>
-            <a:rect l="l" t="t" r="r" b="b"/>
-            <a:pathLst>
-              <a:path w="1267200" h="538560">
-                <a:moveTo>
-                  <a:pt x="1267200" y="0"/>
-                </a:moveTo>
-                <a:lnTo>
-                  <a:pt x="1251314" y="119841"/>
-                </a:lnTo>
-                <a:lnTo>
-                  <a:pt x="1204454" y="233672"/>
-                </a:lnTo>
-                <a:lnTo>
-                  <a:pt x="1128968" y="335787"/>
-                </a:lnTo>
-                <a:lnTo>
-                  <a:pt x="1028643" y="421063"/>
-                </a:lnTo>
-                <a:lnTo>
-                  <a:pt x="908509" y="485226"/>
-                </a:lnTo>
-                <a:lnTo>
-                  <a:pt x="774589" y="525057"/>
-                </a:lnTo>
-                <a:lnTo>
-                  <a:pt x="633600" y="538560"/>
-                </a:lnTo>
-                <a:lnTo>
-                  <a:pt x="492611" y="525057"/>
-                </a:lnTo>
-                <a:lnTo>
-                  <a:pt x="358691" y="485226"/>
-                </a:lnTo>
-                <a:lnTo>
-                  <a:pt x="238557" y="421063"/>
-                </a:lnTo>
-                <a:lnTo>
-                  <a:pt x="138232" y="335787"/>
-                </a:lnTo>
-                <a:lnTo>
-                  <a:pt x="62746" y="233672"/>
-                </a:lnTo>
-                <a:lnTo>
-                  <a:pt x="15886" y="119841"/>
-                </a:lnTo>
-                <a:lnTo>
-                  <a:pt x="0" y="0"/>
-                </a:lnTo>
-                <a:close/>
-              </a:path>
-            </a:pathLst>
-          </a:custGeom>
-          <a:solidFill>
-            <a:srgbClr val="D9985F"/>
-          </a:solidFill>
-          <a:ln>
-            <a:noFill/>
-          </a:ln>
-        </p:spPr>
-        <p:txBody>
-          <a:bodyPr rtlCol="0" anchor="ctr"/>
-          <a:lstStyle/>
-          <a:p>
-            <a:pPr algn="ctr"/>
-          </a:p>
-        </p:txBody>
-      </p:sp>
-      <p:sp>
-        <p:nvSpPr>
-          <p:cNvPr id="3" name="Rounded Rectangle 2"/>
-          <p:cNvSpPr/>
-          <p:nvPr/>
-        </p:nvSpPr>
-        <p:spPr>
-          <a:xfrm>
-            <a:off x="1208160" y="1422720"/>
-            <a:ext cx="823680" cy="110880"/>
-          </a:xfrm>
-          <a:prstGeom prst="roundRect">
-            <a:avLst>
-              <a:gd name="adj" fmla="val 42857"/>
-            </a:avLst>
-          </a:prstGeom>
-          <a:solidFill>
-            <a:srgbClr val="895E39"/>
-          </a:solidFill>
-          <a:ln>
-            <a:noFill/>
-          </a:ln>
-        </p:spPr>
-        <p:txBody>
-          <a:bodyPr rtlCol="0" anchor="ctr"/>
-          <a:lstStyle/>
-          <a:p>
-            <a:pPr algn="ctr"/>
-          </a:p>
-        </p:txBody>
-      </p:sp>
-      <p:cxnSp>
-        <p:nvCxnSpPr>
-          <p:cNvPr id="4" name="Connector 3"/>
-          <p:cNvCxnSpPr/>
-          <p:nvPr/>
-        </p:nvCxnSpPr>
-        <p:spPr>
-          <a:xfrm>
-            <a:off x="1524960" y="361440"/>
-            <a:ext cx="570240" cy="475200"/>
-          </a:xfrm>
-          <a:prstGeom prst="line">
-            <a:avLst/>
-          </a:prstGeom>
-          <a:ln w="79200">
-            <a:solidFill>
-              <a:srgbClr val="895E39"/>
-            </a:solidFill>
-          </a:ln>
-        </p:spPr>
-      </p:cxnSp>
-      <p:cxnSp>
-        <p:nvCxnSpPr>
-          <p:cNvPr id="5" name="Connector 4"/>
-          <p:cNvCxnSpPr/>
-          <p:nvPr/>
-        </p:nvCxnSpPr>
-        <p:spPr>
-          <a:xfrm>
-            <a:off x="1715040" y="361440"/>
-            <a:ext cx="538560" cy="411840"/>
-          </a:xfrm>
-          <a:prstGeom prst="line">
-            <a:avLst/>
-          </a:prstGeom>
-          <a:ln w="79200">
-            <a:solidFill>
-              <a:srgbClr val="895E39"/>
-            </a:solidFill>
-          </a:ln>
-        </p:spPr>
-      </p:cxnSp>
-      <p:sp>
-        <p:nvSpPr>
-          <p:cNvPr id="6" name="Rectangle 5"/>
-          <p:cNvSpPr/>
-          <p:nvPr/>
-        </p:nvSpPr>
-        <p:spPr>
-          <a:xfrm>
-            <a:off x="0" y="0"/>
-            <a:ext cx="3240000" cy="1800000"/>
+            <a:off x="2304000" y="504000"/>
+            <a:ext cx="684000" cy="684000"/>
           </a:xfrm>
           <a:prstGeom prst="rect">
             <a:avLst/>
           </a:prstGeom>
-          <a:solidFill>
-            <a:srgbClr val="723F13">
-              <a:alpha val="90000"/>
-            </a:srgbClr>
-          </a:solidFill>
-          <a:ln>
-            <a:noFill/>
+          <a:noFill/>
+          <a:ln w="7200">
+            <a:solidFill>
+              <a:srgbClr val="A3A9B5"/>
+            </a:solidFill>
+            <a:prstDash val="dash"/>
           </a:ln>
         </p:spPr>
         <p:txBody>
@@ -3857,14 +3644,14 @@
       </p:sp>
       <p:sp>
         <p:nvSpPr>
-          <p:cNvPr id="7" name="텍스트"/>
+          <p:cNvPr id="3" name="텍스트"/>
           <p:cNvSpPr txBox="1"/>
           <p:nvPr/>
         </p:nvSpPr>
         <p:spPr>
           <a:xfrm>
-            <a:off x="396000" y="612000"/>
-            <a:ext cx="2448000" cy="432000"/>
+            <a:off x="2304000" y="504000"/>
+            <a:ext cx="684000" cy="684000"/>
           </a:xfrm>
           <a:prstGeom prst="rect">
             <a:avLst/>
@@ -3879,61 +3666,32 @@
           <a:p>
             <a:pPr algn="ctr">
               <a:lnSpc>
-                <a:spcPts val="1739"/>
+                <a:spcPts val="1595"/>
               </a:lnSpc>
             </a:pPr>
             <a:r>
-              <a:rPr sz="1200" b="1">
+              <a:rPr sz="1100" b="1">
                 <a:solidFill>
-                  <a:srgbClr val="FFFFFF"/>
+                  <a:srgbClr val="A3A9B5"/>
                 </a:solidFill>
-                <a:latin typeface="바탕"/>
-                <a:ea typeface="바탕"/>
+                <a:latin typeface="맑은 고딕"/>
+                <a:ea typeface="맑은 고딕"/>
               </a:rPr>
-              <a:t>비 오는 날엔 따뜻한 차 한 잔</a:t>
-            </a:r>
-          </a:p>
-        </p:txBody>
-      </p:sp>
-      <p:sp>
-        <p:nvSpPr>
-          <p:cNvPr id="8" name="Rectangle 7"/>
-          <p:cNvSpPr/>
+              <a:t>QR</a:t>
+            </a:r>
+          </a:p>
+        </p:txBody>
+      </p:sp>
+      <p:sp>
+        <p:nvSpPr>
+          <p:cNvPr id="4" name="텍스트"/>
+          <p:cNvSpPr txBox="1"/>
           <p:nvPr/>
         </p:nvSpPr>
         <p:spPr>
           <a:xfrm>
-            <a:off x="1512000" y="1173600"/>
-            <a:ext cx="216000" cy="10800"/>
-          </a:xfrm>
-          <a:prstGeom prst="rect">
-            <a:avLst/>
-          </a:prstGeom>
-          <a:solidFill>
-            <a:srgbClr val="D9985F"/>
-          </a:solidFill>
-          <a:ln>
-            <a:noFill/>
-          </a:ln>
-        </p:spPr>
-        <p:txBody>
-          <a:bodyPr rtlCol="0" anchor="ctr"/>
-          <a:lstStyle/>
-          <a:p>
-            <a:pPr algn="ctr"/>
-          </a:p>
-        </p:txBody>
-      </p:sp>
-      <p:sp>
-        <p:nvSpPr>
-          <p:cNvPr id="9" name="텍스트"/>
-          <p:cNvSpPr txBox="1"/>
-          <p:nvPr/>
-        </p:nvSpPr>
-        <p:spPr>
-          <a:xfrm>
-            <a:off x="360000" y="1288800"/>
-            <a:ext cx="2520000" cy="108000"/>
+            <a:off x="252000" y="504000"/>
+            <a:ext cx="1728000" cy="720000"/>
           </a:xfrm>
           <a:prstGeom prst="rect">
             <a:avLst/>
@@ -3946,15 +3704,101 @@
           </a:bodyPr>
           <a:lstStyle/>
           <a:p>
-            <a:pPr algn="ctr">
+            <a:pPr algn="l">
               <a:lnSpc>
-                <a:spcPts val="1087"/>
+                <a:spcPts val="1739"/>
               </a:lnSpc>
             </a:pPr>
             <a:r>
-              <a:rPr sz="750" b="1" spc="300">
+              <a:rPr sz="1200" b="1">
                 <a:solidFill>
-                  <a:srgbClr val="CEBCAC"/>
+                  <a:srgbClr val="FFFFFF"/>
+                </a:solidFill>
+                <a:latin typeface="맑은 고딕"/>
+                <a:ea typeface="맑은 고딕"/>
+              </a:rPr>
+              <a:t>비 오는 날엔</a:t>
+            </a:r>
+          </a:p>
+          <a:p>
+            <a:pPr algn="l">
+              <a:lnSpc>
+                <a:spcPts val="1739"/>
+              </a:lnSpc>
+            </a:pPr>
+            <a:r>
+              <a:rPr sz="1200" b="1">
+                <a:solidFill>
+                  <a:srgbClr val="FFFFFF"/>
+                </a:solidFill>
+                <a:latin typeface="맑은 고딕"/>
+                <a:ea typeface="맑은 고딕"/>
+              </a:rPr>
+              <a:t>따뜻한 차 한 잔</a:t>
+            </a:r>
+          </a:p>
+        </p:txBody>
+      </p:sp>
+      <p:sp>
+        <p:nvSpPr>
+          <p:cNvPr id="5" name="Rectangle 4"/>
+          <p:cNvSpPr/>
+          <p:nvPr/>
+        </p:nvSpPr>
+        <p:spPr>
+          <a:xfrm>
+            <a:off x="252000" y="1296000"/>
+            <a:ext cx="144000" cy="18000"/>
+          </a:xfrm>
+          <a:prstGeom prst="rect">
+            <a:avLst/>
+          </a:prstGeom>
+          <a:solidFill>
+            <a:srgbClr val="7367FF"/>
+          </a:solidFill>
+          <a:ln>
+            <a:noFill/>
+          </a:ln>
+        </p:spPr>
+        <p:txBody>
+          <a:bodyPr rtlCol="0" anchor="ctr"/>
+          <a:lstStyle/>
+          <a:p>
+            <a:pPr algn="ctr"/>
+          </a:p>
+        </p:txBody>
+      </p:sp>
+      <p:sp>
+        <p:nvSpPr>
+          <p:cNvPr id="6" name="텍스트"/>
+          <p:cNvSpPr txBox="1"/>
+          <p:nvPr/>
+        </p:nvSpPr>
+        <p:spPr>
+          <a:xfrm>
+            <a:off x="252000" y="1404000"/>
+            <a:ext cx="1656000" cy="133351"/>
+          </a:xfrm>
+          <a:prstGeom prst="rect">
+            <a:avLst/>
+          </a:prstGeom>
+          <a:noFill/>
+        </p:spPr>
+        <p:txBody>
+          <a:bodyPr wrap="square" lIns="0" rIns="0" tIns="0" bIns="0" anchor="t">
+            <a:spAutoFit/>
+          </a:bodyPr>
+          <a:lstStyle/>
+          <a:p>
+            <a:pPr algn="l">
+              <a:lnSpc>
+                <a:spcPts val="1015"/>
+              </a:lnSpc>
+            </a:pPr>
+            <a:r>
+              <a:rPr sz="700" b="1" spc="200">
+                <a:solidFill>
+                  <a:srgbClr val="A3A9B5"/>
                 </a:solidFill>
                 <a:latin typeface="맑은 고딕"/>
                 <a:ea typeface="맑은 고딕"/>

--- a/public/fun/cards/food/food-23.pptx
+++ b/public/fun/cards/food/food-23.pptx
@@ -3105,8 +3105,8 @@
         </p:nvSpPr>
         <p:spPr>
           <a:xfrm>
-            <a:off x="2016000" y="0"/>
-            <a:ext cx="1224000" cy="1800000"/>
+            <a:off x="2124000" y="0"/>
+            <a:ext cx="1116000" cy="1800000"/>
           </a:xfrm>
           <a:custGeom>
             <a:avLst/>
@@ -3115,15 +3115,15 @@
             <a:cxnLst/>
             <a:rect l="l" t="t" r="r" b="b"/>
             <a:pathLst>
-              <a:path w="1224000" h="1800000">
+              <a:path w="1116000" h="1800000">
                 <a:moveTo>
                   <a:pt x="360000" y="0"/>
                 </a:moveTo>
                 <a:lnTo>
-                  <a:pt x="1224000" y="0"/>
+                  <a:pt x="1116000" y="0"/>
                 </a:lnTo>
                 <a:lnTo>
-                  <a:pt x="1224000" y="1800000"/>
+                  <a:pt x="1116000" y="1800000"/>
                 </a:lnTo>
                 <a:lnTo>
                   <a:pt x="0" y="1800000"/>
@@ -3147,66 +3147,79 @@
           </a:p>
         </p:txBody>
       </p:sp>
-      <p:sp>
-        <p:nvSpPr>
-          <p:cNvPr id="3" name="Freeform 2"/>
-          <p:cNvSpPr/>
+      <p:cxnSp>
+        <p:nvCxnSpPr>
+          <p:cNvPr id="3" name="Connector 2"/>
+          <p:cNvCxnSpPr/>
           <p:nvPr/>
-        </p:nvSpPr>
-        <p:spPr>
-          <a:xfrm>
-            <a:off x="1864800" y="0"/>
-            <a:ext cx="460800" cy="1800000"/>
-          </a:xfrm>
-          <a:custGeom>
+        </p:nvCxnSpPr>
+        <p:spPr>
+          <a:xfrm flipH="1">
+            <a:off x="2044800" y="0"/>
+            <a:ext cx="360000" cy="1800000"/>
+          </a:xfrm>
+          <a:prstGeom prst="line">
             <a:avLst/>
-            <a:gdLst/>
-            <a:ahLst/>
-            <a:cxnLst/>
-            <a:rect l="l" t="t" r="r" b="b"/>
-            <a:pathLst>
-              <a:path w="460800" h="1800000">
-                <a:moveTo>
-                  <a:pt x="360000" y="0"/>
-                </a:moveTo>
-                <a:lnTo>
-                  <a:pt x="460800" y="0"/>
-                </a:lnTo>
-                <a:lnTo>
-                  <a:pt x="100800" y="1800000"/>
-                </a:lnTo>
-                <a:lnTo>
-                  <a:pt x="0" y="1800000"/>
-                </a:lnTo>
-                <a:close/>
-              </a:path>
-            </a:pathLst>
-          </a:custGeom>
-          <a:solidFill>
-            <a:srgbClr val="6E61FF"/>
-          </a:solidFill>
-          <a:ln>
-            <a:noFill/>
+          </a:prstGeom>
+          <a:ln w="3600">
+            <a:solidFill>
+              <a:srgbClr val="D7D4FF"/>
+            </a:solidFill>
           </a:ln>
         </p:spPr>
-        <p:txBody>
-          <a:bodyPr rtlCol="0" anchor="ctr"/>
-          <a:lstStyle/>
-          <a:p>
-            <a:pPr algn="ctr"/>
-          </a:p>
-        </p:txBody>
-      </p:sp>
-      <p:sp>
-        <p:nvSpPr>
-          <p:cNvPr id="4" name="텍스트"/>
+      </p:cxnSp>
+      <p:cxnSp>
+        <p:nvCxnSpPr>
+          <p:cNvPr id="4" name="Connector 3"/>
+          <p:cNvCxnSpPr/>
+          <p:nvPr/>
+        </p:nvCxnSpPr>
+        <p:spPr>
+          <a:xfrm flipH="1">
+            <a:off x="1965600" y="0"/>
+            <a:ext cx="360000" cy="1800000"/>
+          </a:xfrm>
+          <a:prstGeom prst="line">
+            <a:avLst/>
+          </a:prstGeom>
+          <a:ln w="3600">
+            <a:solidFill>
+              <a:srgbClr val="D7D4FF"/>
+            </a:solidFill>
+          </a:ln>
+        </p:spPr>
+      </p:cxnSp>
+      <p:cxnSp>
+        <p:nvCxnSpPr>
+          <p:cNvPr id="5" name="Connector 4"/>
+          <p:cNvCxnSpPr/>
+          <p:nvPr/>
+        </p:nvCxnSpPr>
+        <p:spPr>
+          <a:xfrm flipH="1">
+            <a:off x="1886400" y="0"/>
+            <a:ext cx="360000" cy="1800000"/>
+          </a:xfrm>
+          <a:prstGeom prst="line">
+            <a:avLst/>
+          </a:prstGeom>
+          <a:ln w="3600">
+            <a:solidFill>
+              <a:srgbClr val="D7D4FF"/>
+            </a:solidFill>
+          </a:ln>
+        </p:spPr>
+      </p:cxnSp>
+      <p:sp>
+        <p:nvSpPr>
+          <p:cNvPr id="6" name="텍스트"/>
           <p:cNvSpPr txBox="1"/>
           <p:nvPr/>
         </p:nvSpPr>
         <p:spPr>
           <a:xfrm>
-            <a:off x="252000" y="223200"/>
-            <a:ext cx="1440000" cy="133351"/>
+            <a:off x="252000" y="252000"/>
+            <a:ext cx="1440000" cy="123826"/>
           </a:xfrm>
           <a:prstGeom prst="rect">
             <a:avLst/>
@@ -3221,11 +3234,11 @@
           <a:p>
             <a:pPr algn="l">
               <a:lnSpc>
-                <a:spcPts val="1015"/>
+                <a:spcPts val="942"/>
               </a:lnSpc>
             </a:pPr>
             <a:r>
-              <a:rPr sz="700" b="1" spc="200">
+              <a:rPr sz="650" b="1" spc="220">
                 <a:solidFill>
                   <a:srgbClr val="D7D4FF"/>
                 </a:solidFill>
@@ -3237,16 +3250,37 @@
           </a:p>
         </p:txBody>
       </p:sp>
-      <p:sp>
-        <p:nvSpPr>
-          <p:cNvPr id="5" name="텍스트"/>
+      <p:cxnSp>
+        <p:nvCxnSpPr>
+          <p:cNvPr id="7" name="Connector 6"/>
+          <p:cNvCxnSpPr/>
+          <p:nvPr/>
+        </p:nvCxnSpPr>
+        <p:spPr>
+          <a:xfrm>
+            <a:off x="252000" y="374400"/>
+            <a:ext cx="1260000" cy="0"/>
+          </a:xfrm>
+          <a:prstGeom prst="line">
+            <a:avLst/>
+          </a:prstGeom>
+          <a:ln w="3600">
+            <a:solidFill>
+              <a:srgbClr val="9289FF"/>
+            </a:solidFill>
+          </a:ln>
+        </p:spPr>
+      </p:cxnSp>
+      <p:sp>
+        <p:nvSpPr>
+          <p:cNvPr id="8" name="텍스트"/>
           <p:cNvSpPr txBox="1"/>
           <p:nvPr/>
         </p:nvSpPr>
         <p:spPr>
           <a:xfrm>
-            <a:off x="252000" y="540000"/>
-            <a:ext cx="1584000" cy="360000"/>
+            <a:off x="252000" y="633600"/>
+            <a:ext cx="1800000" cy="237600"/>
           </a:xfrm>
           <a:prstGeom prst="rect">
             <a:avLst/>
@@ -3261,11 +3295,11 @@
           <a:p>
             <a:pPr algn="l">
               <a:lnSpc>
-                <a:spcPts val="3190"/>
+                <a:spcPts val="1957"/>
               </a:lnSpc>
             </a:pPr>
             <a:r>
-              <a:rPr sz="2200" b="1">
+              <a:rPr sz="1350" b="1" spc="120">
                 <a:solidFill>
                   <a:srgbClr val="FFFFFF"/>
                 </a:solidFill>
@@ -3279,14 +3313,14 @@
       </p:sp>
       <p:sp>
         <p:nvSpPr>
-          <p:cNvPr id="6" name="텍스트"/>
+          <p:cNvPr id="9" name="텍스트"/>
           <p:cNvSpPr txBox="1"/>
           <p:nvPr/>
         </p:nvSpPr>
         <p:spPr>
           <a:xfrm>
-            <a:off x="252000" y="943200"/>
-            <a:ext cx="1584000" cy="171451"/>
+            <a:off x="252000" y="885600"/>
+            <a:ext cx="1800000" cy="133351"/>
           </a:xfrm>
           <a:prstGeom prst="rect">
             <a:avLst/>
@@ -3301,11 +3335,11 @@
           <a:p>
             <a:pPr algn="l">
               <a:lnSpc>
-                <a:spcPts val="1305"/>
+                <a:spcPts val="1015"/>
               </a:lnSpc>
             </a:pPr>
             <a:r>
-              <a:rPr sz="900" b="0">
+              <a:rPr sz="700" b="0" spc="60">
                 <a:solidFill>
                   <a:srgbClr val="D7D4FF"/>
                 </a:solidFill>
@@ -3319,14 +3353,14 @@
       </p:sp>
       <p:sp>
         <p:nvSpPr>
-          <p:cNvPr id="7" name="Rectangle 6"/>
+          <p:cNvPr id="10" name="Rectangle 9"/>
           <p:cNvSpPr/>
           <p:nvPr/>
         </p:nvSpPr>
         <p:spPr>
           <a:xfrm>
-            <a:off x="252000" y="1195200"/>
-            <a:ext cx="144000" cy="18000"/>
+            <a:off x="252000" y="1044000"/>
+            <a:ext cx="129600" cy="14400"/>
           </a:xfrm>
           <a:prstGeom prst="rect">
             <a:avLst/>
@@ -3348,14 +3382,14 @@
       </p:sp>
       <p:sp>
         <p:nvSpPr>
-          <p:cNvPr id="8" name="텍스트"/>
+          <p:cNvPr id="11" name="텍스트"/>
           <p:cNvSpPr txBox="1"/>
           <p:nvPr/>
         </p:nvSpPr>
         <p:spPr>
           <a:xfrm>
-            <a:off x="252000" y="1328400"/>
-            <a:ext cx="331200" cy="99061"/>
+            <a:off x="252000" y="1184400"/>
+            <a:ext cx="324000" cy="91441"/>
           </a:xfrm>
           <a:prstGeom prst="rect">
             <a:avLst/>
@@ -3370,11 +3404,11 @@
           <a:p>
             <a:pPr algn="l">
               <a:lnSpc>
-                <a:spcPts val="754"/>
+                <a:spcPts val="696"/>
               </a:lnSpc>
             </a:pPr>
             <a:r>
-              <a:rPr sz="520" b="1" spc="120">
+              <a:rPr sz="480" b="1" spc="140">
                 <a:solidFill>
                   <a:srgbClr val="D7D4FF"/>
                 </a:solidFill>
@@ -3388,14 +3422,14 @@
       </p:sp>
       <p:sp>
         <p:nvSpPr>
-          <p:cNvPr id="9" name="텍스트"/>
+          <p:cNvPr id="12" name="텍스트"/>
           <p:cNvSpPr txBox="1"/>
           <p:nvPr/>
         </p:nvSpPr>
         <p:spPr>
           <a:xfrm>
-            <a:off x="583200" y="1317600"/>
-            <a:ext cx="1188000" cy="125731"/>
+            <a:off x="576000" y="1173600"/>
+            <a:ext cx="972000" cy="120016"/>
           </a:xfrm>
           <a:prstGeom prst="rect">
             <a:avLst/>
@@ -3410,11 +3444,11 @@
           <a:p>
             <a:pPr algn="l">
               <a:lnSpc>
-                <a:spcPts val="956"/>
+                <a:spcPts val="913"/>
               </a:lnSpc>
             </a:pPr>
             <a:r>
-              <a:rPr sz="660" b="0">
+              <a:rPr sz="630" b="0">
                 <a:solidFill>
                   <a:srgbClr val="FFFFFF"/>
                 </a:solidFill>
@@ -3428,14 +3462,14 @@
       </p:sp>
       <p:sp>
         <p:nvSpPr>
-          <p:cNvPr id="10" name="텍스트"/>
+          <p:cNvPr id="13" name="텍스트"/>
           <p:cNvSpPr txBox="1"/>
           <p:nvPr/>
         </p:nvSpPr>
         <p:spPr>
           <a:xfrm>
-            <a:off x="252000" y="1458000"/>
-            <a:ext cx="331200" cy="99061"/>
+            <a:off x="252000" y="1314000"/>
+            <a:ext cx="324000" cy="91441"/>
           </a:xfrm>
           <a:prstGeom prst="rect">
             <a:avLst/>
@@ -3450,11 +3484,11 @@
           <a:p>
             <a:pPr algn="l">
               <a:lnSpc>
-                <a:spcPts val="754"/>
+                <a:spcPts val="696"/>
               </a:lnSpc>
             </a:pPr>
             <a:r>
-              <a:rPr sz="520" b="1" spc="120">
+              <a:rPr sz="480" b="1" spc="140">
                 <a:solidFill>
                   <a:srgbClr val="D7D4FF"/>
                 </a:solidFill>
@@ -3468,14 +3502,14 @@
       </p:sp>
       <p:sp>
         <p:nvSpPr>
-          <p:cNvPr id="11" name="텍스트"/>
+          <p:cNvPr id="14" name="텍스트"/>
           <p:cNvSpPr txBox="1"/>
           <p:nvPr/>
         </p:nvSpPr>
         <p:spPr>
           <a:xfrm>
-            <a:off x="583200" y="1447200"/>
-            <a:ext cx="1188000" cy="125731"/>
+            <a:off x="576000" y="1303200"/>
+            <a:ext cx="972000" cy="120016"/>
           </a:xfrm>
           <a:prstGeom prst="rect">
             <a:avLst/>
@@ -3490,11 +3524,11 @@
           <a:p>
             <a:pPr algn="l">
               <a:lnSpc>
-                <a:spcPts val="956"/>
+                <a:spcPts val="913"/>
               </a:lnSpc>
             </a:pPr>
             <a:r>
-              <a:rPr sz="660" b="0">
+              <a:rPr sz="630" b="0">
                 <a:solidFill>
                   <a:srgbClr val="FFFFFF"/>
                 </a:solidFill>
@@ -3508,14 +3542,14 @@
       </p:sp>
       <p:sp>
         <p:nvSpPr>
-          <p:cNvPr id="12" name="텍스트"/>
+          <p:cNvPr id="15" name="텍스트"/>
           <p:cNvSpPr txBox="1"/>
           <p:nvPr/>
         </p:nvSpPr>
         <p:spPr>
           <a:xfrm>
-            <a:off x="252000" y="1587600"/>
-            <a:ext cx="331200" cy="99061"/>
+            <a:off x="252000" y="1443600"/>
+            <a:ext cx="324000" cy="91441"/>
           </a:xfrm>
           <a:prstGeom prst="rect">
             <a:avLst/>
@@ -3530,11 +3564,11 @@
           <a:p>
             <a:pPr algn="l">
               <a:lnSpc>
-                <a:spcPts val="754"/>
+                <a:spcPts val="696"/>
               </a:lnSpc>
             </a:pPr>
             <a:r>
-              <a:rPr sz="520" b="1" spc="120">
+              <a:rPr sz="480" b="1" spc="140">
                 <a:solidFill>
                   <a:srgbClr val="D7D4FF"/>
                 </a:solidFill>
@@ -3548,14 +3582,14 @@
       </p:sp>
       <p:sp>
         <p:nvSpPr>
-          <p:cNvPr id="13" name="텍스트"/>
+          <p:cNvPr id="16" name="텍스트"/>
           <p:cNvSpPr txBox="1"/>
           <p:nvPr/>
         </p:nvSpPr>
         <p:spPr>
           <a:xfrm>
-            <a:off x="583200" y="1576800"/>
-            <a:ext cx="1188000" cy="125731"/>
+            <a:off x="576000" y="1432800"/>
+            <a:ext cx="972000" cy="120016"/>
           </a:xfrm>
           <a:prstGeom prst="rect">
             <a:avLst/>
@@ -3570,11 +3604,11 @@
           <a:p>
             <a:pPr algn="l">
               <a:lnSpc>
-                <a:spcPts val="956"/>
+                <a:spcPts val="913"/>
               </a:lnSpc>
             </a:pPr>
             <a:r>
-              <a:rPr sz="660" b="0">
+              <a:rPr sz="630" b="0">
                 <a:solidFill>
                   <a:srgbClr val="FFFFFF"/>
                 </a:solidFill>
@@ -3612,22 +3646,548 @@
         <p:nvPr/>
       </p:nvGrpSpPr>
       <p:grpSpPr/>
-      <p:sp>
-        <p:nvSpPr>
-          <p:cNvPr id="2" name="Rectangle 1"/>
-          <p:cNvSpPr/>
+      <p:cxnSp>
+        <p:nvCxnSpPr>
+          <p:cNvPr id="2" name="Connector 1"/>
+          <p:cNvCxnSpPr/>
           <p:nvPr/>
-        </p:nvSpPr>
-        <p:spPr>
-          <a:xfrm>
-            <a:off x="2304000" y="504000"/>
-            <a:ext cx="684000" cy="684000"/>
+        </p:nvCxnSpPr>
+        <p:spPr>
+          <a:xfrm>
+            <a:off x="396000" y="360000"/>
+            <a:ext cx="0" cy="648000"/>
+          </a:xfrm>
+          <a:prstGeom prst="line">
+            <a:avLst/>
+          </a:prstGeom>
+          <a:ln w="5760">
+            <a:solidFill>
+              <a:srgbClr val="7367FF"/>
+            </a:solidFill>
+          </a:ln>
+        </p:spPr>
+      </p:cxnSp>
+      <p:sp>
+        <p:nvSpPr>
+          <p:cNvPr id="3" name="텍스트"/>
+          <p:cNvSpPr txBox="1"/>
+          <p:nvPr/>
+        </p:nvSpPr>
+        <p:spPr>
+          <a:xfrm>
+            <a:off x="252000" y="187200"/>
+            <a:ext cx="1440000" cy="99061"/>
           </a:xfrm>
           <a:prstGeom prst="rect">
             <a:avLst/>
           </a:prstGeom>
           <a:noFill/>
-          <a:ln w="7200">
+        </p:spPr>
+        <p:txBody>
+          <a:bodyPr wrap="square" lIns="0" rIns="0" tIns="0" bIns="0" anchor="t">
+            <a:spAutoFit/>
+          </a:bodyPr>
+          <a:lstStyle/>
+          <a:p>
+            <a:pPr algn="l">
+              <a:lnSpc>
+                <a:spcPts val="754"/>
+              </a:lnSpc>
+            </a:pPr>
+            <a:r>
+              <a:rPr sz="520" b="1" spc="240">
+                <a:solidFill>
+                  <a:srgbClr val="A3A9B5"/>
+                </a:solidFill>
+                <a:latin typeface="맑은 고딕"/>
+                <a:ea typeface="맑은 고딕"/>
+              </a:rPr>
+              <a:t>대표 메뉴</a:t>
+            </a:r>
+          </a:p>
+        </p:txBody>
+      </p:sp>
+      <p:sp>
+        <p:nvSpPr>
+          <p:cNvPr id="4" name="Oval 3"/>
+          <p:cNvSpPr/>
+          <p:nvPr/>
+        </p:nvSpPr>
+        <p:spPr>
+          <a:xfrm>
+            <a:off x="367200" y="374400"/>
+            <a:ext cx="57600" cy="57600"/>
+          </a:xfrm>
+          <a:prstGeom prst="ellipse">
+            <a:avLst/>
+          </a:prstGeom>
+          <a:solidFill>
+            <a:srgbClr val="7367FF"/>
+          </a:solidFill>
+          <a:ln w="5760">
+            <a:solidFill>
+              <a:srgbClr val="7367FF"/>
+            </a:solidFill>
+          </a:ln>
+        </p:spPr>
+        <p:txBody>
+          <a:bodyPr rtlCol="0" anchor="ctr"/>
+          <a:lstStyle/>
+          <a:p>
+            <a:pPr algn="ctr"/>
+          </a:p>
+        </p:txBody>
+      </p:sp>
+      <p:sp>
+        <p:nvSpPr>
+          <p:cNvPr id="5" name="텍스트"/>
+          <p:cNvSpPr txBox="1"/>
+          <p:nvPr/>
+        </p:nvSpPr>
+        <p:spPr>
+          <a:xfrm>
+            <a:off x="540000" y="331200"/>
+            <a:ext cx="1512000" cy="158400"/>
+          </a:xfrm>
+          <a:prstGeom prst="rect">
+            <a:avLst/>
+          </a:prstGeom>
+          <a:noFill/>
+        </p:spPr>
+        <p:txBody>
+          <a:bodyPr wrap="square" lIns="0" rIns="0" tIns="0" bIns="0" anchor="t">
+            <a:spAutoFit/>
+          </a:bodyPr>
+          <a:lstStyle/>
+          <a:p>
+            <a:pPr algn="l">
+              <a:lnSpc>
+                <a:spcPts val="1073"/>
+              </a:lnSpc>
+            </a:pPr>
+            <a:r>
+              <a:rPr sz="740" b="1">
+                <a:solidFill>
+                  <a:srgbClr val="FFFFFF"/>
+                </a:solidFill>
+                <a:latin typeface="맑은 고딕"/>
+                <a:ea typeface="맑은 고딕"/>
+              </a:rPr>
+              <a:t>핸드드립</a:t>
+            </a:r>
+          </a:p>
+        </p:txBody>
+      </p:sp>
+      <p:sp>
+        <p:nvSpPr>
+          <p:cNvPr id="6" name="Oval 5"/>
+          <p:cNvSpPr/>
+          <p:nvPr/>
+        </p:nvSpPr>
+        <p:spPr>
+          <a:xfrm>
+            <a:off x="367200" y="597600"/>
+            <a:ext cx="57600" cy="57600"/>
+          </a:xfrm>
+          <a:prstGeom prst="ellipse">
+            <a:avLst/>
+          </a:prstGeom>
+          <a:solidFill>
+            <a:srgbClr val="0E1116"/>
+          </a:solidFill>
+          <a:ln w="5760">
+            <a:solidFill>
+              <a:srgbClr val="7367FF"/>
+            </a:solidFill>
+          </a:ln>
+        </p:spPr>
+        <p:txBody>
+          <a:bodyPr rtlCol="0" anchor="ctr"/>
+          <a:lstStyle/>
+          <a:p>
+            <a:pPr algn="ctr"/>
+          </a:p>
+        </p:txBody>
+      </p:sp>
+      <p:sp>
+        <p:nvSpPr>
+          <p:cNvPr id="7" name="텍스트"/>
+          <p:cNvSpPr txBox="1"/>
+          <p:nvPr/>
+        </p:nvSpPr>
+        <p:spPr>
+          <a:xfrm>
+            <a:off x="540000" y="554400"/>
+            <a:ext cx="1512000" cy="158400"/>
+          </a:xfrm>
+          <a:prstGeom prst="rect">
+            <a:avLst/>
+          </a:prstGeom>
+          <a:noFill/>
+        </p:spPr>
+        <p:txBody>
+          <a:bodyPr wrap="square" lIns="0" rIns="0" tIns="0" bIns="0" anchor="t">
+            <a:spAutoFit/>
+          </a:bodyPr>
+          <a:lstStyle/>
+          <a:p>
+            <a:pPr algn="l">
+              <a:lnSpc>
+                <a:spcPts val="1073"/>
+              </a:lnSpc>
+            </a:pPr>
+            <a:r>
+              <a:rPr sz="740" b="1">
+                <a:solidFill>
+                  <a:srgbClr val="FFFFFF"/>
+                </a:solidFill>
+                <a:latin typeface="맑은 고딕"/>
+                <a:ea typeface="맑은 고딕"/>
+              </a:rPr>
+              <a:t>단체 주문</a:t>
+            </a:r>
+          </a:p>
+        </p:txBody>
+      </p:sp>
+      <p:sp>
+        <p:nvSpPr>
+          <p:cNvPr id="8" name="Oval 7"/>
+          <p:cNvSpPr/>
+          <p:nvPr/>
+        </p:nvSpPr>
+        <p:spPr>
+          <a:xfrm>
+            <a:off x="367200" y="820800"/>
+            <a:ext cx="57600" cy="57600"/>
+          </a:xfrm>
+          <a:prstGeom prst="ellipse">
+            <a:avLst/>
+          </a:prstGeom>
+          <a:solidFill>
+            <a:srgbClr val="0E1116"/>
+          </a:solidFill>
+          <a:ln w="5760">
+            <a:solidFill>
+              <a:srgbClr val="7367FF"/>
+            </a:solidFill>
+          </a:ln>
+        </p:spPr>
+        <p:txBody>
+          <a:bodyPr rtlCol="0" anchor="ctr"/>
+          <a:lstStyle/>
+          <a:p>
+            <a:pPr algn="ctr"/>
+          </a:p>
+        </p:txBody>
+      </p:sp>
+      <p:sp>
+        <p:nvSpPr>
+          <p:cNvPr id="9" name="텍스트"/>
+          <p:cNvSpPr txBox="1"/>
+          <p:nvPr/>
+        </p:nvSpPr>
+        <p:spPr>
+          <a:xfrm>
+            <a:off x="540000" y="777600"/>
+            <a:ext cx="1512000" cy="158400"/>
+          </a:xfrm>
+          <a:prstGeom prst="rect">
+            <a:avLst/>
+          </a:prstGeom>
+          <a:noFill/>
+        </p:spPr>
+        <p:txBody>
+          <a:bodyPr wrap="square" lIns="0" rIns="0" tIns="0" bIns="0" anchor="t">
+            <a:spAutoFit/>
+          </a:bodyPr>
+          <a:lstStyle/>
+          <a:p>
+            <a:pPr algn="l">
+              <a:lnSpc>
+                <a:spcPts val="1073"/>
+              </a:lnSpc>
+            </a:pPr>
+            <a:r>
+              <a:rPr sz="740" b="1">
+                <a:solidFill>
+                  <a:srgbClr val="FFFFFF"/>
+                </a:solidFill>
+                <a:latin typeface="맑은 고딕"/>
+                <a:ea typeface="맑은 고딕"/>
+              </a:rPr>
+              <a:t>포장 · 배달</a:t>
+            </a:r>
+          </a:p>
+        </p:txBody>
+      </p:sp>
+      <p:sp>
+        <p:nvSpPr>
+          <p:cNvPr id="10" name="Oval 9"/>
+          <p:cNvSpPr/>
+          <p:nvPr/>
+        </p:nvSpPr>
+        <p:spPr>
+          <a:xfrm>
+            <a:off x="367200" y="1044000"/>
+            <a:ext cx="57600" cy="57600"/>
+          </a:xfrm>
+          <a:prstGeom prst="ellipse">
+            <a:avLst/>
+          </a:prstGeom>
+          <a:solidFill>
+            <a:srgbClr val="0E1116"/>
+          </a:solidFill>
+          <a:ln w="5760">
+            <a:solidFill>
+              <a:srgbClr val="7367FF"/>
+            </a:solidFill>
+          </a:ln>
+        </p:spPr>
+        <p:txBody>
+          <a:bodyPr rtlCol="0" anchor="ctr"/>
+          <a:lstStyle/>
+          <a:p>
+            <a:pPr algn="ctr"/>
+          </a:p>
+        </p:txBody>
+      </p:sp>
+      <p:sp>
+        <p:nvSpPr>
+          <p:cNvPr id="11" name="텍스트"/>
+          <p:cNvSpPr txBox="1"/>
+          <p:nvPr/>
+        </p:nvSpPr>
+        <p:spPr>
+          <a:xfrm>
+            <a:off x="540000" y="1000800"/>
+            <a:ext cx="1512000" cy="158400"/>
+          </a:xfrm>
+          <a:prstGeom prst="rect">
+            <a:avLst/>
+          </a:prstGeom>
+          <a:noFill/>
+        </p:spPr>
+        <p:txBody>
+          <a:bodyPr wrap="square" lIns="0" rIns="0" tIns="0" bIns="0" anchor="t">
+            <a:spAutoFit/>
+          </a:bodyPr>
+          <a:lstStyle/>
+          <a:p>
+            <a:pPr algn="l">
+              <a:lnSpc>
+                <a:spcPts val="1073"/>
+              </a:lnSpc>
+            </a:pPr>
+            <a:r>
+              <a:rPr sz="740" b="1">
+                <a:solidFill>
+                  <a:srgbClr val="FFFFFF"/>
+                </a:solidFill>
+                <a:latin typeface="맑은 고딕"/>
+                <a:ea typeface="맑은 고딕"/>
+              </a:rPr>
+              <a:t>런치 세트</a:t>
+            </a:r>
+          </a:p>
+        </p:txBody>
+      </p:sp>
+      <p:cxnSp>
+        <p:nvCxnSpPr>
+          <p:cNvPr id="12" name="Connector 11"/>
+          <p:cNvCxnSpPr/>
+          <p:nvPr/>
+        </p:nvCxnSpPr>
+        <p:spPr>
+          <a:xfrm>
+            <a:off x="2232000" y="345600"/>
+            <a:ext cx="0" cy="1166400"/>
+          </a:xfrm>
+          <a:prstGeom prst="line">
+            <a:avLst/>
+          </a:prstGeom>
+          <a:ln w="3600">
+            <a:solidFill>
+              <a:srgbClr val="2A2F38"/>
+            </a:solidFill>
+          </a:ln>
+        </p:spPr>
+      </p:cxnSp>
+      <p:sp>
+        <p:nvSpPr>
+          <p:cNvPr id="13" name="텍스트"/>
+          <p:cNvSpPr txBox="1"/>
+          <p:nvPr/>
+        </p:nvSpPr>
+        <p:spPr>
+          <a:xfrm>
+            <a:off x="2376000" y="396000"/>
+            <a:ext cx="648000" cy="91441"/>
+          </a:xfrm>
+          <a:prstGeom prst="rect">
+            <a:avLst/>
+          </a:prstGeom>
+          <a:noFill/>
+        </p:spPr>
+        <p:txBody>
+          <a:bodyPr wrap="square" lIns="0" rIns="0" tIns="0" bIns="0" anchor="t">
+            <a:spAutoFit/>
+          </a:bodyPr>
+          <a:lstStyle/>
+          <a:p>
+            <a:pPr algn="l">
+              <a:lnSpc>
+                <a:spcPts val="696"/>
+              </a:lnSpc>
+            </a:pPr>
+            <a:r>
+              <a:rPr sz="480" b="1" spc="140">
+                <a:solidFill>
+                  <a:srgbClr val="A3A9B5"/>
+                </a:solidFill>
+                <a:latin typeface="맑은 고딕"/>
+                <a:ea typeface="맑은 고딕"/>
+              </a:rPr>
+              <a:t>HOURS</a:t>
+            </a:r>
+          </a:p>
+        </p:txBody>
+      </p:sp>
+      <p:sp>
+        <p:nvSpPr>
+          <p:cNvPr id="14" name="텍스트"/>
+          <p:cNvSpPr txBox="1"/>
+          <p:nvPr/>
+        </p:nvSpPr>
+        <p:spPr>
+          <a:xfrm>
+            <a:off x="2376000" y="511200"/>
+            <a:ext cx="720000" cy="118111"/>
+          </a:xfrm>
+          <a:prstGeom prst="rect">
+            <a:avLst/>
+          </a:prstGeom>
+          <a:noFill/>
+        </p:spPr>
+        <p:txBody>
+          <a:bodyPr wrap="square" lIns="0" rIns="0" tIns="0" bIns="0" anchor="t">
+            <a:spAutoFit/>
+          </a:bodyPr>
+          <a:lstStyle/>
+          <a:p>
+            <a:pPr algn="l">
+              <a:lnSpc>
+                <a:spcPts val="899"/>
+              </a:lnSpc>
+            </a:pPr>
+            <a:r>
+              <a:rPr sz="620" b="0">
+                <a:solidFill>
+                  <a:srgbClr val="FFFFFF"/>
+                </a:solidFill>
+                <a:latin typeface="맑은 고딕"/>
+                <a:ea typeface="맑은 고딕"/>
+              </a:rPr>
+              <a:t>매일 08:00 – 20:00</a:t>
+            </a:r>
+          </a:p>
+        </p:txBody>
+      </p:sp>
+      <p:sp>
+        <p:nvSpPr>
+          <p:cNvPr id="15" name="텍스트"/>
+          <p:cNvSpPr txBox="1"/>
+          <p:nvPr/>
+        </p:nvSpPr>
+        <p:spPr>
+          <a:xfrm>
+            <a:off x="2376000" y="835200"/>
+            <a:ext cx="648000" cy="91441"/>
+          </a:xfrm>
+          <a:prstGeom prst="rect">
+            <a:avLst/>
+          </a:prstGeom>
+          <a:noFill/>
+        </p:spPr>
+        <p:txBody>
+          <a:bodyPr wrap="square" lIns="0" rIns="0" tIns="0" bIns="0" anchor="t">
+            <a:spAutoFit/>
+          </a:bodyPr>
+          <a:lstStyle/>
+          <a:p>
+            <a:pPr algn="l">
+              <a:lnSpc>
+                <a:spcPts val="696"/>
+              </a:lnSpc>
+            </a:pPr>
+            <a:r>
+              <a:rPr sz="480" b="1" spc="140">
+                <a:solidFill>
+                  <a:srgbClr val="A3A9B5"/>
+                </a:solidFill>
+                <a:latin typeface="맑은 고딕"/>
+                <a:ea typeface="맑은 고딕"/>
+              </a:rPr>
+              <a:t>INSTAGRAM</a:t>
+            </a:r>
+          </a:p>
+        </p:txBody>
+      </p:sp>
+      <p:sp>
+        <p:nvSpPr>
+          <p:cNvPr id="16" name="텍스트"/>
+          <p:cNvSpPr txBox="1"/>
+          <p:nvPr/>
+        </p:nvSpPr>
+        <p:spPr>
+          <a:xfrm>
+            <a:off x="2376000" y="950400"/>
+            <a:ext cx="684000" cy="118111"/>
+          </a:xfrm>
+          <a:prstGeom prst="rect">
+            <a:avLst/>
+          </a:prstGeom>
+          <a:noFill/>
+        </p:spPr>
+        <p:txBody>
+          <a:bodyPr wrap="square" lIns="0" rIns="0" tIns="0" bIns="0" anchor="t">
+            <a:spAutoFit/>
+          </a:bodyPr>
+          <a:lstStyle/>
+          <a:p>
+            <a:pPr algn="l">
+              <a:lnSpc>
+                <a:spcPts val="899"/>
+              </a:lnSpc>
+            </a:pPr>
+            <a:r>
+              <a:rPr sz="620" b="0">
+                <a:solidFill>
+                  <a:srgbClr val="FFFFFF"/>
+                </a:solidFill>
+                <a:latin typeface="맑은 고딕"/>
+                <a:ea typeface="맑은 고딕"/>
+              </a:rPr>
+              <a:t>@아이디</a:t>
+            </a:r>
+          </a:p>
+        </p:txBody>
+      </p:sp>
+      <p:sp>
+        <p:nvSpPr>
+          <p:cNvPr id="17" name="Rectangle 16"/>
+          <p:cNvSpPr/>
+          <p:nvPr/>
+        </p:nvSpPr>
+        <p:spPr>
+          <a:xfrm>
+            <a:off x="2376000" y="1224000"/>
+            <a:ext cx="237600" cy="237600"/>
+          </a:xfrm>
+          <a:prstGeom prst="rect">
+            <a:avLst/>
+          </a:prstGeom>
+          <a:noFill/>
+          <a:ln w="4320">
             <a:solidFill>
               <a:srgbClr val="A3A9B5"/>
             </a:solidFill>
@@ -3644,14 +4204,14 @@
       </p:sp>
       <p:sp>
         <p:nvSpPr>
-          <p:cNvPr id="3" name="텍스트"/>
+          <p:cNvPr id="18" name="텍스트"/>
           <p:cNvSpPr txBox="1"/>
           <p:nvPr/>
         </p:nvSpPr>
         <p:spPr>
           <a:xfrm>
-            <a:off x="2304000" y="504000"/>
-            <a:ext cx="684000" cy="684000"/>
+            <a:off x="2376000" y="1224000"/>
+            <a:ext cx="237600" cy="237600"/>
           </a:xfrm>
           <a:prstGeom prst="rect">
             <a:avLst/>
@@ -3666,11 +4226,11 @@
           <a:p>
             <a:pPr algn="ctr">
               <a:lnSpc>
-                <a:spcPts val="1595"/>
+                <a:spcPts val="725"/>
               </a:lnSpc>
             </a:pPr>
             <a:r>
-              <a:rPr sz="1100" b="1">
+              <a:rPr sz="500" b="1">
                 <a:solidFill>
                   <a:srgbClr val="A3A9B5"/>
                 </a:solidFill>
@@ -3678,132 +4238,6 @@
                 <a:ea typeface="맑은 고딕"/>
               </a:rPr>
               <a:t>QR</a:t>
-            </a:r>
-          </a:p>
-        </p:txBody>
-      </p:sp>
-      <p:sp>
-        <p:nvSpPr>
-          <p:cNvPr id="4" name="텍스트"/>
-          <p:cNvSpPr txBox="1"/>
-          <p:nvPr/>
-        </p:nvSpPr>
-        <p:spPr>
-          <a:xfrm>
-            <a:off x="252000" y="504000"/>
-            <a:ext cx="1728000" cy="720000"/>
-          </a:xfrm>
-          <a:prstGeom prst="rect">
-            <a:avLst/>
-          </a:prstGeom>
-          <a:noFill/>
-        </p:spPr>
-        <p:txBody>
-          <a:bodyPr wrap="square" lIns="0" rIns="0" tIns="0" bIns="0" anchor="t">
-            <a:spAutoFit/>
-          </a:bodyPr>
-          <a:lstStyle/>
-          <a:p>
-            <a:pPr algn="l">
-              <a:lnSpc>
-                <a:spcPts val="1739"/>
-              </a:lnSpc>
-            </a:pPr>
-            <a:r>
-              <a:rPr sz="1200" b="1">
-                <a:solidFill>
-                  <a:srgbClr val="FFFFFF"/>
-                </a:solidFill>
-                <a:latin typeface="맑은 고딕"/>
-                <a:ea typeface="맑은 고딕"/>
-              </a:rPr>
-              <a:t>비 오는 날엔</a:t>
-            </a:r>
-          </a:p>
-          <a:p>
-            <a:pPr algn="l">
-              <a:lnSpc>
-                <a:spcPts val="1739"/>
-              </a:lnSpc>
-            </a:pPr>
-            <a:r>
-              <a:rPr sz="1200" b="1">
-                <a:solidFill>
-                  <a:srgbClr val="FFFFFF"/>
-                </a:solidFill>
-                <a:latin typeface="맑은 고딕"/>
-                <a:ea typeface="맑은 고딕"/>
-              </a:rPr>
-              <a:t>따뜻한 차 한 잔</a:t>
-            </a:r>
-          </a:p>
-        </p:txBody>
-      </p:sp>
-      <p:sp>
-        <p:nvSpPr>
-          <p:cNvPr id="5" name="Rectangle 4"/>
-          <p:cNvSpPr/>
-          <p:nvPr/>
-        </p:nvSpPr>
-        <p:spPr>
-          <a:xfrm>
-            <a:off x="252000" y="1296000"/>
-            <a:ext cx="144000" cy="18000"/>
-          </a:xfrm>
-          <a:prstGeom prst="rect">
-            <a:avLst/>
-          </a:prstGeom>
-          <a:solidFill>
-            <a:srgbClr val="7367FF"/>
-          </a:solidFill>
-          <a:ln>
-            <a:noFill/>
-          </a:ln>
-        </p:spPr>
-        <p:txBody>
-          <a:bodyPr rtlCol="0" anchor="ctr"/>
-          <a:lstStyle/>
-          <a:p>
-            <a:pPr algn="ctr"/>
-          </a:p>
-        </p:txBody>
-      </p:sp>
-      <p:sp>
-        <p:nvSpPr>
-          <p:cNvPr id="6" name="텍스트"/>
-          <p:cNvSpPr txBox="1"/>
-          <p:nvPr/>
-        </p:nvSpPr>
-        <p:spPr>
-          <a:xfrm>
-            <a:off x="252000" y="1404000"/>
-            <a:ext cx="1656000" cy="133351"/>
-          </a:xfrm>
-          <a:prstGeom prst="rect">
-            <a:avLst/>
-          </a:prstGeom>
-          <a:noFill/>
-        </p:spPr>
-        <p:txBody>
-          <a:bodyPr wrap="square" lIns="0" rIns="0" tIns="0" bIns="0" anchor="t">
-            <a:spAutoFit/>
-          </a:bodyPr>
-          <a:lstStyle/>
-          <a:p>
-            <a:pPr algn="l">
-              <a:lnSpc>
-                <a:spcPts val="1015"/>
-              </a:lnSpc>
-            </a:pPr>
-            <a:r>
-              <a:rPr sz="700" b="1" spc="200">
-                <a:solidFill>
-                  <a:srgbClr val="A3A9B5"/>
-                </a:solidFill>
-                <a:latin typeface="맑은 고딕"/>
-                <a:ea typeface="맑은 고딕"/>
-              </a:rPr>
-              <a:t>상호명</a:t>
             </a:r>
           </a:p>
         </p:txBody>
